--- a/docs/pptx/carbo/ritu-carbo-adjcif-akikdigo.pptx
+++ b/docs/pptx/carbo/ritu-carbo-adjcif-akikdigo.pptx
@@ -2271,7 +2271,7 @@
           </p:nvSpPr>
           <p:spPr>
             <a:xfrm>
-              <a:off x="972874" y="5203243"/>
+              <a:off x="972874" y="5205228"/>
               <a:ext cx="7644336" cy="0"/>
             </a:xfrm>
             <a:custGeom>
@@ -2314,7 +2314,7 @@
           </p:nvSpPr>
           <p:spPr>
             <a:xfrm>
-              <a:off x="972874" y="4448885"/>
+              <a:off x="972874" y="4454841"/>
               <a:ext cx="7644336" cy="0"/>
             </a:xfrm>
             <a:custGeom>
@@ -2357,7 +2357,7 @@
           </p:nvSpPr>
           <p:spPr>
             <a:xfrm>
-              <a:off x="972874" y="3694527"/>
+              <a:off x="972874" y="3704453"/>
               <a:ext cx="7644336" cy="0"/>
             </a:xfrm>
             <a:custGeom>
@@ -2400,7 +2400,7 @@
           </p:nvSpPr>
           <p:spPr>
             <a:xfrm>
-              <a:off x="972874" y="2940169"/>
+              <a:off x="972874" y="2954066"/>
               <a:ext cx="7644336" cy="0"/>
             </a:xfrm>
             <a:custGeom>
@@ -2658,7 +2658,7 @@
           </p:nvSpPr>
           <p:spPr>
             <a:xfrm>
-              <a:off x="972874" y="4826064"/>
+              <a:off x="972874" y="4830034"/>
               <a:ext cx="7644336" cy="0"/>
             </a:xfrm>
             <a:custGeom>
@@ -2701,7 +2701,7 @@
           </p:nvSpPr>
           <p:spPr>
             <a:xfrm>
-              <a:off x="972874" y="4071706"/>
+              <a:off x="972874" y="4079647"/>
               <a:ext cx="7644336" cy="0"/>
             </a:xfrm>
             <a:custGeom>
@@ -2744,7 +2744,7 @@
           </p:nvSpPr>
           <p:spPr>
             <a:xfrm>
-              <a:off x="972874" y="3317348"/>
+              <a:off x="972874" y="3329259"/>
               <a:ext cx="7644336" cy="0"/>
             </a:xfrm>
             <a:custGeom>
@@ -3199,7 +3199,7 @@
           </p:nvSpPr>
           <p:spPr>
             <a:xfrm>
-              <a:off x="692708" y="4786013"/>
+              <a:off x="692708" y="4789984"/>
               <a:ext cx="217535" cy="80101"/>
             </a:xfrm>
             <a:prstGeom prst="rect">
@@ -3245,7 +3245,7 @@
           </p:nvSpPr>
           <p:spPr>
             <a:xfrm>
-              <a:off x="692708" y="4031655"/>
+              <a:off x="692708" y="4039596"/>
               <a:ext cx="217535" cy="80101"/>
             </a:xfrm>
             <a:prstGeom prst="rect">
@@ -3291,7 +3291,7 @@
           </p:nvSpPr>
           <p:spPr>
             <a:xfrm>
-              <a:off x="692708" y="3277297"/>
+              <a:off x="692708" y="3289209"/>
               <a:ext cx="217535" cy="80101"/>
             </a:xfrm>
             <a:prstGeom prst="rect">
